--- a/Introduccion a la Ingenieria/Clases/Clase 6 - Analisis de problemas tecnologicos del entorno/Presentacion.pptx
+++ b/Introduccion a la Ingenieria/Clases/Clase 6 - Analisis de problemas tecnologicos del entorno/Presentacion.pptx
@@ -5914,7 +5914,7 @@
               </a:spcAft>
             </a:pPr>
             <a:r>
-              <a:rPr sz="1600" b="0" i="0">
+              <a:rPr sz="2000" b="0" i="0">
                 <a:solidFill>
                   <a:srgbClr val="333333"/>
                 </a:solidFill>
@@ -5923,7 +5923,7 @@
               <a:t>–   </a:t>
             </a:r>
             <a:r>
-              <a:rPr sz="1600" b="1" i="0">
+              <a:rPr sz="2000" b="1" i="0">
                 <a:solidFill>
                   <a:srgbClr val="333333"/>
                 </a:solidFill>
@@ -5932,7 +5932,7 @@
               <a:t>Trabajo dirigido:</a:t>
             </a:r>
             <a:r>
-              <a:rPr sz="1600" b="0" i="0">
+              <a:rPr sz="2000" b="0" i="0">
                 <a:solidFill>
                   <a:srgbClr val="333333"/>
                 </a:solidFill>
@@ -5948,7 +5948,7 @@
               </a:spcAft>
             </a:pPr>
             <a:r>
-              <a:rPr sz="1600" b="0" i="0">
+              <a:rPr sz="2000" b="0" i="0">
                 <a:solidFill>
                   <a:srgbClr val="333333"/>
                 </a:solidFill>
@@ -5957,7 +5957,7 @@
               <a:t>–   </a:t>
             </a:r>
             <a:r>
-              <a:rPr sz="1600" b="1" i="0">
+              <a:rPr sz="2000" b="1" i="0">
                 <a:solidFill>
                   <a:srgbClr val="333333"/>
                 </a:solidFill>
@@ -5966,7 +5966,7 @@
               <a:t>Trabajo independiente:</a:t>
             </a:r>
             <a:r>
-              <a:rPr sz="1600" b="0" i="0">
+              <a:rPr sz="2000" b="0" i="0">
                 <a:solidFill>
                   <a:srgbClr val="333333"/>
                 </a:solidFill>
@@ -5975,7 +5975,7 @@
               <a:t> Propuesta inicial de solución: media página con </a:t>
             </a:r>
             <a:r>
-              <a:rPr sz="1600" b="1" i="0">
+              <a:rPr sz="2000" b="1" i="0">
                 <a:solidFill>
                   <a:srgbClr val="333333"/>
                 </a:solidFill>
@@ -5984,7 +5984,7 @@
               <a:t>dos</a:t>
             </a:r>
             <a:r>
-              <a:rPr sz="1600" b="0" i="0">
+              <a:rPr sz="2000" b="0" i="0">
                 <a:solidFill>
                   <a:srgbClr val="333333"/>
                 </a:solidFill>
@@ -6000,7 +6000,7 @@
               </a:spcAft>
             </a:pPr>
             <a:r>
-              <a:rPr sz="1600" b="0" i="0">
+              <a:rPr sz="2000" b="0" i="0">
                 <a:solidFill>
                   <a:srgbClr val="333333"/>
                 </a:solidFill>
@@ -6009,7 +6009,7 @@
               <a:t>–   </a:t>
             </a:r>
             <a:r>
-              <a:rPr sz="1600" b="1" i="0">
+              <a:rPr sz="2000" b="1" i="0">
                 <a:solidFill>
                   <a:srgbClr val="333333"/>
                 </a:solidFill>
@@ -6018,7 +6018,7 @@
               <a:t>Sesión 7 · Ciclo de vida de los proyectos de ingeniería</a:t>
             </a:r>
             <a:r>
-              <a:rPr sz="1600" b="0" i="0">
+              <a:rPr sz="2000" b="0" i="0">
                 <a:solidFill>
                   <a:srgbClr val="333333"/>
                 </a:solidFill>
@@ -6027,7 +6027,7 @@
               <a:t> — el </a:t>
             </a:r>
             <a:r>
-              <a:rPr sz="1600" b="1" i="0">
+              <a:rPr sz="2000" b="1" i="0">
                 <a:solidFill>
                   <a:srgbClr val="333333"/>
                 </a:solidFill>
@@ -6036,7 +6036,7 @@
               <a:t>ciclo de vida de los proyectos de ingeniería</a:t>
             </a:r>
             <a:r>
-              <a:rPr sz="1600" b="0" i="0">
+              <a:rPr sz="2000" b="0" i="0">
                 <a:solidFill>
                   <a:srgbClr val="333333"/>
                 </a:solidFill>
@@ -6052,7 +6052,7 @@
               </a:spcAft>
             </a:pPr>
             <a:r>
-              <a:rPr sz="1600" b="0" i="0">
+              <a:rPr sz="2000" b="0" i="0">
                 <a:solidFill>
                   <a:srgbClr val="333333"/>
                 </a:solidFill>
@@ -6061,7 +6061,7 @@
               <a:t>–   </a:t>
             </a:r>
             <a:r>
-              <a:rPr sz="1600" b="1" i="0">
+              <a:rPr sz="2000" b="1" i="0">
                 <a:solidFill>
                   <a:srgbClr val="333333"/>
                 </a:solidFill>
@@ -6070,7 +6070,7 @@
               <a:t>Aviso:</a:t>
             </a:r>
             <a:r>
-              <a:rPr sz="1600" b="0" i="0">
+              <a:rPr sz="2000" b="0" i="0">
                 <a:solidFill>
                   <a:srgbClr val="333333"/>
                 </a:solidFill>
@@ -6086,7 +6086,7 @@
               </a:spcAft>
             </a:pPr>
             <a:r>
-              <a:rPr sz="1600" b="0" i="0">
+              <a:rPr sz="2000" b="0" i="0">
                 <a:solidFill>
                   <a:srgbClr val="333333"/>
                 </a:solidFill>
@@ -6095,7 +6095,7 @@
               <a:t>–   </a:t>
             </a:r>
             <a:r>
-              <a:rPr sz="1600" b="1" i="0">
+              <a:rPr sz="2000" b="1" i="0">
                 <a:solidFill>
                   <a:srgbClr val="333333"/>
                 </a:solidFill>
@@ -6104,7 +6104,7 @@
               <a:t>Antes de salir:</a:t>
             </a:r>
             <a:r>
-              <a:rPr sz="1600" b="0" i="0">
+              <a:rPr sz="2000" b="0" i="0">
                 <a:solidFill>
                   <a:srgbClr val="333333"/>
                 </a:solidFill>
@@ -6678,7 +6678,7 @@
         <p:spPr>
           <a:xfrm>
             <a:off x="502920" y="2798064"/>
-            <a:ext cx="1788109" cy="2560320"/>
+            <a:ext cx="1788109" cy="3099816"/>
           </a:xfrm>
           <a:prstGeom prst="rect">
             <a:avLst/>
@@ -6793,7 +6793,7 @@
         <p:spPr>
           <a:xfrm>
             <a:off x="2382469" y="2798064"/>
-            <a:ext cx="1788109" cy="2560320"/>
+            <a:ext cx="1788109" cy="3099816"/>
           </a:xfrm>
           <a:prstGeom prst="rect">
             <a:avLst/>
@@ -6908,7 +6908,7 @@
         <p:spPr>
           <a:xfrm>
             <a:off x="4262018" y="2798064"/>
-            <a:ext cx="1788109" cy="2560320"/>
+            <a:ext cx="1788109" cy="3099816"/>
           </a:xfrm>
           <a:prstGeom prst="rect">
             <a:avLst/>
@@ -7023,7 +7023,7 @@
         <p:spPr>
           <a:xfrm>
             <a:off x="6141567" y="2798064"/>
-            <a:ext cx="1788109" cy="2560320"/>
+            <a:ext cx="1788109" cy="3099816"/>
           </a:xfrm>
           <a:prstGeom prst="rect">
             <a:avLst/>
@@ -7138,7 +7138,7 @@
         <p:spPr>
           <a:xfrm>
             <a:off x="8021116" y="2798064"/>
-            <a:ext cx="1788109" cy="2560320"/>
+            <a:ext cx="1788109" cy="3099816"/>
           </a:xfrm>
           <a:prstGeom prst="rect">
             <a:avLst/>
@@ -7253,7 +7253,7 @@
         <p:spPr>
           <a:xfrm>
             <a:off x="9900666" y="2798064"/>
-            <a:ext cx="1788109" cy="2560320"/>
+            <a:ext cx="1788109" cy="3099816"/>
           </a:xfrm>
           <a:prstGeom prst="rect">
             <a:avLst/>
@@ -7287,8 +7287,8 @@
         </p:nvSpPr>
         <p:spPr>
           <a:xfrm>
-            <a:off x="457200" y="5943600"/>
-            <a:ext cx="11277295" cy="365760"/>
+            <a:off x="457200" y="5806440"/>
+            <a:ext cx="11277295" cy="640080"/>
           </a:xfrm>
           <a:prstGeom prst="rect">
             <a:avLst/>
@@ -7303,7 +7303,7 @@
           <a:p>
             <a:pPr algn="ctr"/>
             <a:r>
-              <a:rPr sz="1200" b="1" i="1">
+              <a:rPr sz="1100" b="1" i="1">
                 <a:solidFill>
                   <a:srgbClr val="666666"/>
                 </a:solidFill>
@@ -7312,7 +7312,7 @@
               <a:t>Esta sesión cierra el corte 1 (30 %).</a:t>
             </a:r>
             <a:r>
-              <a:rPr sz="1200" b="0" i="1">
+              <a:rPr sz="1100" b="0" i="1">
                 <a:solidFill>
                   <a:srgbClr val="666666"/>
                 </a:solidFill>
@@ -7321,7 +7321,7 @@
               <a:t> Trae dos cosas que las demás no tienen: la </a:t>
             </a:r>
             <a:r>
-              <a:rPr sz="1200" b="1" i="1">
+              <a:rPr sz="1100" b="1" i="1">
                 <a:solidFill>
                   <a:srgbClr val="666666"/>
                 </a:solidFill>
@@ -7330,7 +7330,7 @@
               <a:t>ficha del problema del proyecto</a:t>
             </a:r>
             <a:r>
-              <a:rPr sz="1200" b="0" i="1">
+              <a:rPr sz="1100" b="0" i="1">
                 <a:solidFill>
                   <a:srgbClr val="666666"/>
                 </a:solidFill>
@@ -7339,7 +7339,7 @@
               <a:t>, que es el producto del corte y gobierna el resto del semestre, y la </a:t>
             </a:r>
             <a:r>
-              <a:rPr sz="1200" b="1" i="1">
+              <a:rPr sz="1100" b="1" i="1">
                 <a:solidFill>
                   <a:srgbClr val="666666"/>
                 </a:solidFill>
@@ -7348,7 +7348,7 @@
               <a:t>evaluación de corte en ExamLab</a:t>
             </a:r>
             <a:r>
-              <a:rPr sz="1200" b="0" i="1">
+              <a:rPr sz="1100" b="0" i="1">
                 <a:solidFill>
                   <a:srgbClr val="666666"/>
                 </a:solidFill>
@@ -7568,7 +7568,7 @@
               </a:spcAft>
             </a:pPr>
             <a:r>
-              <a:rPr sz="1600" b="0" i="0">
+              <a:rPr sz="2000" b="0" i="0">
                 <a:solidFill>
                   <a:srgbClr val="333333"/>
                 </a:solidFill>
@@ -7577,7 +7577,7 @@
               <a:t>–   Distinguir un </a:t>
             </a:r>
             <a:r>
-              <a:rPr sz="1600" b="1" i="0">
+              <a:rPr sz="2000" b="1" i="0">
                 <a:solidFill>
                   <a:srgbClr val="333333"/>
                 </a:solidFill>
@@ -7586,7 +7586,7 @@
               <a:t>problema</a:t>
             </a:r>
             <a:r>
-              <a:rPr sz="1600" b="0" i="0">
+              <a:rPr sz="2000" b="0" i="0">
                 <a:solidFill>
                   <a:srgbClr val="333333"/>
                 </a:solidFill>
@@ -7595,7 +7595,7 @@
               <a:t> de un </a:t>
             </a:r>
             <a:r>
-              <a:rPr sz="1600" b="1" i="0">
+              <a:rPr sz="2000" b="1" i="0">
                 <a:solidFill>
                   <a:srgbClr val="333333"/>
                 </a:solidFill>
@@ -7604,7 +7604,7 @@
               <a:t>síntoma</a:t>
             </a:r>
             <a:r>
-              <a:rPr sz="1600" b="0" i="0">
+              <a:rPr sz="2000" b="0" i="0">
                 <a:solidFill>
                   <a:srgbClr val="333333"/>
                 </a:solidFill>
@@ -7613,7 +7613,7 @@
               <a:t> y de una </a:t>
             </a:r>
             <a:r>
-              <a:rPr sz="1600" b="1" i="0">
+              <a:rPr sz="2000" b="1" i="0">
                 <a:solidFill>
                   <a:srgbClr val="333333"/>
                 </a:solidFill>
@@ -7622,7 +7622,7 @@
               <a:t>solución disfrazada de problema</a:t>
             </a:r>
             <a:r>
-              <a:rPr sz="1600" b="0" i="0">
+              <a:rPr sz="2000" b="0" i="0">
                 <a:solidFill>
                   <a:srgbClr val="333333"/>
                 </a:solidFill>
@@ -7638,7 +7638,7 @@
               </a:spcAft>
             </a:pPr>
             <a:r>
-              <a:rPr sz="1600" b="0" i="0">
+              <a:rPr sz="2000" b="0" i="0">
                 <a:solidFill>
                   <a:srgbClr val="333333"/>
                 </a:solidFill>
@@ -7647,7 +7647,7 @@
               <a:t>–   Construir el </a:t>
             </a:r>
             <a:r>
-              <a:rPr sz="1600" b="1" i="0">
+              <a:rPr sz="2000" b="1" i="0">
                 <a:solidFill>
                   <a:srgbClr val="333333"/>
                 </a:solidFill>
@@ -7656,7 +7656,7 @@
               <a:t>árbol de causas</a:t>
             </a:r>
             <a:r>
-              <a:rPr sz="1600" b="0" i="0">
+              <a:rPr sz="2000" b="0" i="0">
                 <a:solidFill>
                   <a:srgbClr val="333333"/>
                 </a:solidFill>
@@ -7672,7 +7672,7 @@
               </a:spcAft>
             </a:pPr>
             <a:r>
-              <a:rPr sz="1600" b="0" i="0">
+              <a:rPr sz="2000" b="0" i="0">
                 <a:solidFill>
                   <a:srgbClr val="333333"/>
                 </a:solidFill>
@@ -7681,7 +7681,7 @@
               <a:t>–   Escribir una </a:t>
             </a:r>
             <a:r>
-              <a:rPr sz="1600" b="1" i="0">
+              <a:rPr sz="2000" b="1" i="0">
                 <a:solidFill>
                   <a:srgbClr val="333333"/>
                 </a:solidFill>
@@ -7690,7 +7690,7 @@
               <a:t>línea base</a:t>
             </a:r>
             <a:r>
-              <a:rPr sz="1600" b="0" i="0">
+              <a:rPr sz="2000" b="0" i="0">
                 <a:solidFill>
                   <a:srgbClr val="333333"/>
                 </a:solidFill>
@@ -7706,7 +7706,7 @@
               </a:spcAft>
             </a:pPr>
             <a:r>
-              <a:rPr sz="1600" b="0" i="0">
+              <a:rPr sz="2000" b="0" i="0">
                 <a:solidFill>
                   <a:srgbClr val="333333"/>
                 </a:solidFill>
@@ -7715,7 +7715,7 @@
               <a:t>–   Verificar que el problema elegido </a:t>
             </a:r>
             <a:r>
-              <a:rPr sz="1600" b="1" i="0">
+              <a:rPr sz="2000" b="1" i="0">
                 <a:solidFill>
                   <a:srgbClr val="333333"/>
                 </a:solidFill>
@@ -7724,7 +7724,7 @@
               <a:t>cabe en un semestre</a:t>
             </a:r>
             <a:r>
-              <a:rPr sz="1600" b="0" i="0">
+              <a:rPr sz="2000" b="0" i="0">
                 <a:solidFill>
                   <a:srgbClr val="333333"/>
                 </a:solidFill>
@@ -7740,7 +7740,7 @@
               </a:spcAft>
             </a:pPr>
             <a:r>
-              <a:rPr sz="1600" b="0" i="0">
+              <a:rPr sz="2000" b="0" i="0">
                 <a:solidFill>
                   <a:srgbClr val="333333"/>
                 </a:solidFill>
@@ -7749,7 +7749,7 @@
               <a:t>–   Entregar la </a:t>
             </a:r>
             <a:r>
-              <a:rPr sz="1600" b="1" i="0">
+              <a:rPr sz="2000" b="1" i="0">
                 <a:solidFill>
                   <a:srgbClr val="333333"/>
                 </a:solidFill>
@@ -7758,7 +7758,7 @@
               <a:t>ficha del problema</a:t>
             </a:r>
             <a:r>
-              <a:rPr sz="1600" b="0" i="0">
+              <a:rPr sz="2000" b="0" i="0">
                 <a:solidFill>
                   <a:srgbClr val="333333"/>
                 </a:solidFill>
@@ -8427,7 +8427,7 @@
               </a:spcAft>
             </a:pPr>
             <a:r>
-              <a:rPr sz="1300" b="0" i="0">
+              <a:rPr sz="1500" b="0" i="0">
                 <a:solidFill>
                   <a:srgbClr val="333333"/>
                 </a:solidFill>
@@ -8443,7 +8443,7 @@
               </a:spcAft>
             </a:pPr>
             <a:r>
-              <a:rPr sz="1300" b="0" i="0">
+              <a:rPr sz="1500" b="0" i="0">
                 <a:solidFill>
                   <a:srgbClr val="333333"/>
                 </a:solidFill>
@@ -8459,7 +8459,7 @@
               </a:spcAft>
             </a:pPr>
             <a:r>
-              <a:rPr sz="1300" b="0" i="0">
+              <a:rPr sz="1500" b="0" i="0">
                 <a:solidFill>
                   <a:srgbClr val="333333"/>
                 </a:solidFill>
@@ -8475,7 +8475,7 @@
               </a:spcAft>
             </a:pPr>
             <a:r>
-              <a:rPr sz="1300" b="0" i="0">
+              <a:rPr sz="1500" b="0" i="0">
                 <a:solidFill>
                   <a:srgbClr val="333333"/>
                 </a:solidFill>
@@ -8491,7 +8491,7 @@
               </a:spcAft>
             </a:pPr>
             <a:r>
-              <a:rPr sz="1300" b="0" i="0">
+              <a:rPr sz="1500" b="0" i="0">
                 <a:solidFill>
                   <a:srgbClr val="333333"/>
                 </a:solidFill>
@@ -8651,7 +8651,7 @@
               </a:spcAft>
             </a:pPr>
             <a:r>
-              <a:rPr sz="1300" b="0" i="0">
+              <a:rPr sz="1500" b="0" i="0">
                 <a:solidFill>
                   <a:srgbClr val="333333"/>
                 </a:solidFill>
@@ -8660,7 +8660,7 @@
               <a:t>–   </a:t>
             </a:r>
             <a:r>
-              <a:rPr sz="1300" b="1" i="0">
+              <a:rPr sz="1500" b="1" i="0">
                 <a:solidFill>
                   <a:srgbClr val="333333"/>
                 </a:solidFill>
@@ -8669,7 +8669,7 @@
               <a:t>Solución disfrazada.</a:t>
             </a:r>
             <a:r>
-              <a:rPr sz="1300" b="0" i="0">
+              <a:rPr sz="1500" b="0" i="0">
                 <a:solidFill>
                   <a:srgbClr val="333333"/>
                 </a:solidFill>
@@ -8685,7 +8685,7 @@
               </a:spcAft>
             </a:pPr>
             <a:r>
-              <a:rPr sz="1300" b="0" i="0">
+              <a:rPr sz="1500" b="0" i="0">
                 <a:solidFill>
                   <a:srgbClr val="333333"/>
                 </a:solidFill>
@@ -8694,7 +8694,7 @@
               <a:t>–   </a:t>
             </a:r>
             <a:r>
-              <a:rPr sz="1300" b="1" i="0">
+              <a:rPr sz="1500" b="1" i="0">
                 <a:solidFill>
                   <a:srgbClr val="333333"/>
                 </a:solidFill>
@@ -8703,7 +8703,7 @@
               <a:t>Síntoma.</a:t>
             </a:r>
             <a:r>
-              <a:rPr sz="1300" b="0" i="0">
+              <a:rPr sz="1500" b="0" i="0">
                 <a:solidFill>
                   <a:srgbClr val="333333"/>
                 </a:solidFill>
@@ -8719,7 +8719,7 @@
               </a:spcAft>
             </a:pPr>
             <a:r>
-              <a:rPr sz="1300" b="0" i="0">
+              <a:rPr sz="1500" b="0" i="0">
                 <a:solidFill>
                   <a:srgbClr val="333333"/>
                 </a:solidFill>
@@ -8728,7 +8728,7 @@
               <a:t>–   </a:t>
             </a:r>
             <a:r>
-              <a:rPr sz="1300" b="1" i="0">
+              <a:rPr sz="1500" b="1" i="0">
                 <a:solidFill>
                   <a:srgbClr val="333333"/>
                 </a:solidFill>
@@ -8737,7 +8737,7 @@
               <a:t>Juicio, no problema.</a:t>
             </a:r>
             <a:r>
-              <a:rPr sz="1300" b="0" i="0">
+              <a:rPr sz="1500" b="0" i="0">
                 <a:solidFill>
                   <a:srgbClr val="333333"/>
                 </a:solidFill>
@@ -8753,7 +8753,7 @@
               </a:spcAft>
             </a:pPr>
             <a:r>
-              <a:rPr sz="1300" b="0" i="0">
+              <a:rPr sz="1500" b="0" i="0">
                 <a:solidFill>
                   <a:srgbClr val="333333"/>
                 </a:solidFill>
@@ -8762,7 +8762,7 @@
               <a:t>–   </a:t>
             </a:r>
             <a:r>
-              <a:rPr sz="1300" b="1" i="0">
+              <a:rPr sz="1500" b="1" i="0">
                 <a:solidFill>
                   <a:srgbClr val="333333"/>
                 </a:solidFill>
@@ -8771,7 +8771,7 @@
               <a:t>Solución disfrazada, y con herramienta ya elegida.</a:t>
             </a:r>
             <a:r>
-              <a:rPr sz="1300" b="0" i="0">
+              <a:rPr sz="1500" b="0" i="0">
                 <a:solidFill>
                   <a:srgbClr val="333333"/>
                 </a:solidFill>
@@ -8787,7 +8787,7 @@
               </a:spcAft>
             </a:pPr>
             <a:r>
-              <a:rPr sz="1300" b="0" i="0">
+              <a:rPr sz="1500" b="0" i="0">
                 <a:solidFill>
                   <a:srgbClr val="333333"/>
                 </a:solidFill>
@@ -8796,7 +8796,7 @@
               <a:t>–   </a:t>
             </a:r>
             <a:r>
-              <a:rPr sz="1300" b="1" i="0">
+              <a:rPr sz="1500" b="1" i="0">
                 <a:solidFill>
                   <a:srgbClr val="333333"/>
                 </a:solidFill>
@@ -8805,7 +8805,7 @@
               <a:t>Casi.</a:t>
             </a:r>
             <a:r>
-              <a:rPr sz="1300" b="0" i="0">
+              <a:rPr sz="1500" b="0" i="0">
                 <a:solidFill>
                   <a:srgbClr val="333333"/>
                 </a:solidFill>
@@ -9933,7 +9933,7 @@
               </a:spcAft>
             </a:pPr>
             <a:r>
-              <a:rPr sz="1300" b="0" i="0">
+              <a:rPr sz="2000" b="0" i="0">
                 <a:solidFill>
                   <a:srgbClr val="333333"/>
                 </a:solidFill>
@@ -9942,7 +9942,7 @@
               <a:t>–   </a:t>
             </a:r>
             <a:r>
-              <a:rPr sz="1300" b="1" i="0">
+              <a:rPr sz="2000" b="1" i="0">
                 <a:solidFill>
                   <a:srgbClr val="333333"/>
                 </a:solidFill>
@@ -9951,7 +9951,7 @@
               <a:t>Qué es.</a:t>
             </a:r>
             <a:r>
-              <a:rPr sz="1300" b="0" i="0">
+              <a:rPr sz="2000" b="0" i="0">
                 <a:solidFill>
                   <a:srgbClr val="333333"/>
                 </a:solidFill>
@@ -9960,7 +9960,7 @@
               <a:t> Una cifra que describa el problema </a:t>
             </a:r>
             <a:r>
-              <a:rPr sz="1300" b="1" i="0">
+              <a:rPr sz="2000" b="1" i="0">
                 <a:solidFill>
                   <a:srgbClr val="333333"/>
                 </a:solidFill>
@@ -9969,7 +9969,7 @@
               <a:t>como está hoy</a:t>
             </a:r>
             <a:r>
-              <a:rPr sz="1300" b="0" i="0">
+              <a:rPr sz="2000" b="0" i="0">
                 <a:solidFill>
                   <a:srgbClr val="333333"/>
                 </a:solidFill>
@@ -9985,7 +9985,7 @@
               </a:spcAft>
             </a:pPr>
             <a:r>
-              <a:rPr sz="1300" b="0" i="0">
+              <a:rPr sz="2000" b="0" i="0">
                 <a:solidFill>
                   <a:srgbClr val="333333"/>
                 </a:solidFill>
@@ -9994,7 +9994,7 @@
               <a:t>–   </a:t>
             </a:r>
             <a:r>
-              <a:rPr sz="1300" b="1" i="0">
+              <a:rPr sz="2000" b="1" i="0">
                 <a:solidFill>
                   <a:srgbClr val="333333"/>
                 </a:solidFill>
@@ -10003,7 +10003,7 @@
               <a:t>Por qué es obligatoria.</a:t>
             </a:r>
             <a:r>
-              <a:rPr sz="1300" b="0" i="0">
+              <a:rPr sz="2000" b="0" i="0">
                 <a:solidFill>
                   <a:srgbClr val="333333"/>
                 </a:solidFill>
@@ -10012,7 +10012,7 @@
               <a:t> Sin línea base </a:t>
             </a:r>
             <a:r>
-              <a:rPr sz="1300" b="1" i="0">
+              <a:rPr sz="2000" b="1" i="0">
                 <a:solidFill>
                   <a:srgbClr val="333333"/>
                 </a:solidFill>
@@ -10021,7 +10021,7 @@
               <a:t>no se puede saber si el proyecto sirvió</a:t>
             </a:r>
             <a:r>
-              <a:rPr sz="1300" b="0" i="0">
+              <a:rPr sz="2000" b="0" i="0">
                 <a:solidFill>
                   <a:srgbClr val="333333"/>
                 </a:solidFill>
@@ -10037,7 +10037,7 @@
               </a:spcAft>
             </a:pPr>
             <a:r>
-              <a:rPr sz="1300" b="0" i="0">
+              <a:rPr sz="2000" b="0" i="0">
                 <a:solidFill>
                   <a:srgbClr val="333333"/>
                 </a:solidFill>
@@ -10046,7 +10046,7 @@
               <a:t>–   </a:t>
             </a:r>
             <a:r>
-              <a:rPr sz="1300" b="1" i="0">
+              <a:rPr sz="2000" b="1" i="0">
                 <a:solidFill>
                   <a:srgbClr val="333333"/>
                 </a:solidFill>
@@ -10055,7 +10055,7 @@
               <a:t>Cómo se consigue sin presupuesto.</a:t>
             </a:r>
             <a:r>
-              <a:rPr sz="1300" b="0" i="0">
+              <a:rPr sz="2000" b="0" i="0">
                 <a:solidFill>
                   <a:srgbClr val="333333"/>
                 </a:solidFill>
@@ -10064,7 +10064,7 @@
               <a:t> Preguntando, contando y midiendo con un cronómetro. Tres preguntas a la persona que hace el trabajo, un conteo de una semana, o el tiempo de un caso medido a mano. </a:t>
             </a:r>
             <a:r>
-              <a:rPr sz="1300" b="1" i="0">
+              <a:rPr sz="2000" b="1" i="0">
                 <a:solidFill>
                   <a:srgbClr val="333333"/>
                 </a:solidFill>
@@ -10073,7 +10073,7 @@
               <a:t>No hace falta una encuesta científica</a:t>
             </a:r>
             <a:r>
-              <a:rPr sz="1300" b="0" i="0">
+              <a:rPr sz="2000" b="0" i="0">
                 <a:solidFill>
                   <a:srgbClr val="333333"/>
                 </a:solidFill>
@@ -10089,7 +10089,7 @@
               </a:spcAft>
             </a:pPr>
             <a:r>
-              <a:rPr sz="1300" b="0" i="0">
+              <a:rPr sz="2000" b="0" i="0">
                 <a:solidFill>
                   <a:srgbClr val="333333"/>
                 </a:solidFill>
@@ -10098,7 +10098,7 @@
               <a:t>–   </a:t>
             </a:r>
             <a:r>
-              <a:rPr sz="1300" b="1" i="0">
+              <a:rPr sz="2000" b="1" i="0">
                 <a:solidFill>
                   <a:srgbClr val="333333"/>
                 </a:solidFill>
@@ -10107,7 +10107,7 @@
               <a:t>La regla de honestidad.</a:t>
             </a:r>
             <a:r>
-              <a:rPr sz="1300" b="0" i="0">
+              <a:rPr sz="2000" b="0" i="0">
                 <a:solidFill>
                   <a:srgbClr val="333333"/>
                 </a:solidFill>
@@ -10116,7 +10116,7 @@
               <a:t> Toda cifra va con </a:t>
             </a:r>
             <a:r>
-              <a:rPr sz="1300" b="1" i="0">
+              <a:rPr sz="2000" b="1" i="0">
                 <a:solidFill>
                   <a:srgbClr val="333333"/>
                 </a:solidFill>
@@ -10125,7 +10125,7 @@
               <a:t>cómo se obtuvo y cuándo</a:t>
             </a:r>
             <a:r>
-              <a:rPr sz="1300" b="0" i="0">
+              <a:rPr sz="2000" b="0" i="0">
                 <a:solidFill>
                   <a:srgbClr val="333333"/>
                 </a:solidFill>
@@ -10141,7 +10141,7 @@
               </a:spcAft>
             </a:pPr>
             <a:r>
-              <a:rPr sz="1300" b="0" i="0">
+              <a:rPr sz="2000" b="0" i="0">
                 <a:solidFill>
                   <a:srgbClr val="333333"/>
                 </a:solidFill>
@@ -10150,7 +10150,7 @@
               <a:t>–   </a:t>
             </a:r>
             <a:r>
-              <a:rPr sz="1300" b="1" i="0">
+              <a:rPr sz="2000" b="1" i="0">
                 <a:solidFill>
                   <a:srgbClr val="333333"/>
                 </a:solidFill>
@@ -10159,7 +10159,7 @@
               <a:t>Si el problema no tiene cifra posible</a:t>
             </a:r>
             <a:r>
-              <a:rPr sz="1300" b="0" i="0">
+              <a:rPr sz="2000" b="0" i="0">
                 <a:solidFill>
                   <a:srgbClr val="333333"/>
                 </a:solidFill>

--- a/Introduccion a la Ingenieria/Clases/Clase 6 - Analisis de problemas tecnologicos del entorno/Presentacion.pptx
+++ b/Introduccion a la Ingenieria/Clases/Clase 6 - Analisis de problemas tecnologicos del entorno/Presentacion.pptx
@@ -7159,7 +7159,7 @@
                 </a:solidFill>
                 <a:latin typeface="Calibri"/>
               </a:rPr>
-              <a:t>Evaluación de corte 1 — En ExamLab · cubre las sesiones 1 a 6</a:t>
+              <a:t>Evaluación de corte 1 — En la plataforma del curso · cubre las sesiones 1 a 6</a:t>
             </a:r>
           </a:p>
         </p:txBody>
@@ -7345,7 +7345,7 @@
                 </a:solidFill>
                 <a:latin typeface="Calibri"/>
               </a:rPr>
-              <a:t>evaluación de corte en ExamLab</a:t>
+              <a:t>evaluación de corte en la plataforma del curso</a:t>
             </a:r>
             <a:r>
               <a:rPr sz="1100" b="0" i="1">
@@ -11472,7 +11472,7 @@
                 </a:solidFill>
                 <a:latin typeface="Calibri"/>
               </a:rPr>
-              <a:t>Los últimos 20 minutos son la evaluación de corte, en ExamLab.</a:t>
+              <a:t>Los últimos 20 minutos son la evaluación de corte, en la plataforma del curso.</a:t>
             </a:r>
             <a:r>
               <a:rPr sz="1400" b="0" i="0">
@@ -11619,7 +11619,7 @@
                 </a:solidFill>
                 <a:latin typeface="Calibri"/>
               </a:rPr>
-              <a:t>ExamLab no es una plataforma oficial de la universidad</a:t>
+              <a:t>la plataforma del curso no es una plataforma oficial de la universidad</a:t>
             </a:r>
             <a:r>
               <a:rPr sz="1400" b="0" i="0">

--- a/Introduccion a la Ingenieria/Clases/Clase 6 - Analisis de problemas tecnologicos del entorno/Presentacion.pptx
+++ b/Introduccion a la Ingenieria/Clases/Clase 6 - Analisis de problemas tecnologicos del entorno/Presentacion.pptx
@@ -5881,7 +5881,7 @@
                 </a:solidFill>
                 <a:latin typeface="Calibri"/>
               </a:rPr>
-              <a:t>Para la sesión 7</a:t>
+              <a:t>Para la Clase 7</a:t>
             </a:r>
           </a:p>
         </p:txBody>
@@ -6015,7 +6015,7 @@
                 </a:solidFill>
                 <a:latin typeface="Calibri"/>
               </a:rPr>
-              <a:t>Sesión 7 · Ciclo de vida de los proyectos de ingeniería</a:t>
+              <a:t>Clase 7 · Ciclo de vida de los proyectos de ingeniería</a:t>
             </a:r>
             <a:r>
               <a:rPr sz="2000" b="0" i="0">
@@ -10027,7 +10027,7 @@
                 </a:solidFill>
                 <a:latin typeface="Calibri"/>
               </a:rPr>
-              <a:t>. Un informe final que dice «mejoramos el proceso» no demuestra nada; uno que dice «pasó de 2 horas a 20 minutos» sí. En la sesión 16 se les va a pedir exactamente eso.</a:t>
+              <a:t>. Un informe final que dice «mejoramos el proceso» no demuestra nada; uno que dice «pasó de 2 horas a 20 minutos» sí. En la Clase 16 se les va a pedir exactamente eso.</a:t>
             </a:r>
           </a:p>
           <a:p>
